--- a/final_deliverables/v5/20261009_最終発表_v5.pptx
+++ b/final_deliverables/v5/20261009_最終発表_v5.pptx
@@ -404,16 +404,13 @@
               <c:strCache>
                 <c:ptCount val="3"/>
                 <c:pt idx="0">
-                  <c:v>潜在0〜2人
-(578名)</c:v>
+                  <c:v>潜在0〜2人</c:v>
                 </c:pt>
                 <c:pt idx="1">
-                  <c:v>潜在3〜7人
-(2,007名)</c:v>
+                  <c:v>潜在3〜7人</c:v>
                 </c:pt>
                 <c:pt idx="2">
-                  <c:v>潜在8人以上
-(701名)</c:v>
+                  <c:v>潜在8人以上</c:v>
                 </c:pt>
               </c:strCache>
             </c:strRef>
@@ -484,7 +481,7 @@
           <a:lstStyle/>
           <a:p>
             <a:pPr>
-              <a:defRPr sz="1400">
+              <a:defRPr sz="1500">
                 <a:latin typeface="Meiryo"/>
               </a:defRPr>
             </a:pPr>
@@ -564,12 +561,10 @@
               <c:strCache>
                 <c:ptCount val="2"/>
                 <c:pt idx="0">
-                  <c:v>内科
-(292名)</c:v>
+                  <c:v>内科</c:v>
                 </c:pt>
                 <c:pt idx="1">
-                  <c:v>耳鼻咽喉科
-(409名)</c:v>
+                  <c:v>耳鼻咽喉科</c:v>
                 </c:pt>
               </c:strCache>
             </c:strRef>
@@ -615,12 +610,10 @@
               <c:strCache>
                 <c:ptCount val="2"/>
                 <c:pt idx="0">
-                  <c:v>内科
-(292名)</c:v>
+                  <c:v>内科</c:v>
                 </c:pt>
                 <c:pt idx="1">
-                  <c:v>耳鼻咽喉科
-(409名)</c:v>
+                  <c:v>耳鼻咽喉科</c:v>
                 </c:pt>
               </c:strCache>
             </c:strRef>
@@ -666,12 +659,10 @@
               <c:strCache>
                 <c:ptCount val="2"/>
                 <c:pt idx="0">
-                  <c:v>内科
-(292名)</c:v>
+                  <c:v>内科</c:v>
                 </c:pt>
                 <c:pt idx="1">
-                  <c:v>耳鼻咽喉科
-(409名)</c:v>
+                  <c:v>耳鼻咽喉科</c:v>
                 </c:pt>
               </c:strCache>
             </c:strRef>
@@ -717,12 +708,10 @@
               <c:strCache>
                 <c:ptCount val="2"/>
                 <c:pt idx="0">
-                  <c:v>内科
-(292名)</c:v>
+                  <c:v>内科</c:v>
                 </c:pt>
                 <c:pt idx="1">
-                  <c:v>耳鼻咽喉科
-(409名)</c:v>
+                  <c:v>耳鼻咽喉科</c:v>
                 </c:pt>
               </c:strCache>
             </c:strRef>
@@ -888,15 +877,15 @@
                 <c:ptCount val="3"/>
                 <c:pt idx="0">
                   <c:v>① 未接触の重点医師
-191名</c:v>
+約1.2万人</c:v>
                 </c:pt>
                 <c:pt idx="1">
                   <c:v>② 配信中の重点医師
-392名</c:v>
+約2.4万人</c:v>
                 </c:pt>
                 <c:pt idx="2">
                   <c:v>③ 潜在0〜2人の医師
-993名(全診療科)</c:v>
+約6.2万人</c:v>
                 </c:pt>
               </c:strCache>
             </c:strRef>
@@ -946,15 +935,15 @@
                 <c:ptCount val="3"/>
                 <c:pt idx="0">
                   <c:v>① 未接触の重点医師
-191名</c:v>
+約1.2万人</c:v>
                 </c:pt>
                 <c:pt idx="1">
                   <c:v>② 配信中の重点医師
-392名</c:v>
+約2.4万人</c:v>
                 </c:pt>
                 <c:pt idx="2">
                   <c:v>③ 潜在0〜2人の医師
-993名(全診療科)</c:v>
+約6.2万人</c:v>
                 </c:pt>
               </c:strCache>
             </c:strRef>
@@ -1508,15 +1497,15 @@
                 <c:ptCount val="3"/>
                 <c:pt idx="0">
                   <c:v>現状
-3,481名</c:v>
+約21.6万人</c:v>
                 </c:pt>
                 <c:pt idx="1">
                   <c:v>A案 予算維持型
-3,672名</c:v>
+約22.8万人</c:v>
                 </c:pt>
                 <c:pt idx="2">
                   <c:v>B案 追加投資型
-3,932名</c:v>
+約24.4万人</c:v>
                 </c:pt>
               </c:strCache>
             </c:strRef>
@@ -1528,20 +1517,20 @@
                 <c:formatCode>General</c:formatCode>
                 <c:ptCount val="3"/>
                 <c:pt idx="0">
-                  <c:v>160.2</c:v>
+                  <c:v>9930</c:v>
                 </c:pt>
                 <c:pt idx="1">
-                  <c:v>153.4</c:v>
+                  <c:v>9514</c:v>
                 </c:pt>
                 <c:pt idx="2">
-                  <c:v>168.3</c:v>
+                  <c:v>10436</c:v>
                 </c:pt>
               </c:numCache>
             </c:numRef>
           </c:val>
         </c:ser>
         <c:dLbls>
-          <c:numFmt formatCode="0.0" sourceLinked="0"/>
+          <c:numFmt formatCode="#,##0" sourceLinked="0"/>
           <c:txPr>
             <a:bodyPr/>
             <a:lstStyle/>
@@ -1603,7 +1592,7 @@
       <c:valAx>
         <c:axId val="-2113994440"/>
         <c:scaling>
-          <c:max val="200.0"/>
+          <c:max val="12500.0"/>
           <c:min val="0.0"/>
         </c:scaling>
         <c:delete/>
@@ -1688,13 +1677,13 @@
                 <c:formatCode>General</c:formatCode>
                 <c:ptCount val="3"/>
                 <c:pt idx="0">
-                  <c:v>120</c:v>
+                  <c:v>241</c:v>
                 </c:pt>
                 <c:pt idx="1">
-                  <c:v>361</c:v>
+                  <c:v>722</c:v>
                 </c:pt>
                 <c:pt idx="2">
-                  <c:v>722</c:v>
+                  <c:v>1444</c:v>
                 </c:pt>
               </c:numCache>
             </c:numRef>
@@ -1746,13 +1735,13 @@
                 <c:formatCode>General</c:formatCode>
                 <c:ptCount val="3"/>
                 <c:pt idx="0">
-                  <c:v>326</c:v>
+                  <c:v>651</c:v>
                 </c:pt>
                 <c:pt idx="1">
-                  <c:v>977</c:v>
+                  <c:v>1954</c:v>
                 </c:pt>
                 <c:pt idx="2">
-                  <c:v>1954</c:v>
+                  <c:v>3908</c:v>
                 </c:pt>
               </c:numCache>
             </c:numRef>
@@ -1822,7 +1811,7 @@
       <c:valAx>
         <c:axId val="-2113994440"/>
         <c:scaling>
-          <c:max val="2300.0"/>
+          <c:max val="4600.0"/>
           <c:min val="0.0"/>
         </c:scaling>
         <c:delete/>
@@ -2262,12 +2251,12 @@
           <a:lstStyle/>
           <a:p>
             <a:r>
-              <a:t>[0:45] 薬剤Aの処方拡大に向けて、MR君の配信対象とコンテンツの最適化を提案します。</a:t>
-            </a:r>
-          </a:p>
-          <a:p>
-            <a:r>
-              <a:t>MR君はすでに全医師の69%に届き、MR面談のない医師では「最も参考になった情報源」の1位です。この基盤は強みです。</a:t>
+              <a:t>[0:50] 薬剤Aの処方拡大に向けて、MR君の配信対象とコンテンツの最適化を提案します。</a:t>
+            </a:r>
+          </a:p>
+          <a:p>
+            <a:r>
+              <a:t>MR君は、国内の医師の約9割、31万人が登録するm3.comで配信でき、今回のデータでも医師の69%に届いています。MR面談のない医師では「最も参考になった情報源」の1位です。この基盤は強みです。</a:t>
             </a:r>
           </a:p>
           <a:p>
@@ -2412,17 +2401,22 @@
           <a:lstStyle/>
           <a:p>
             <a:r>
-              <a:t>[0:45] まず、機会はどこにあるか。</a:t>
-            </a:r>
-          </a:p>
-          <a:p>
-            <a:r>
-              <a:t>花粉症の患者数から薬剤Aの処方患者数を引いた「潜在未処方患者」で見ると、その77%が内科と耳鼻咽喉科にいます。そのうち潜在8人以上の701名、医師の21%が、潜在の41%を持っています。</a:t>
-            </a:r>
-          </a:p>
-          <a:p>
-            <a:r>
-              <a:t>この701名を重点医師とし、MR君の配信を寄せます。</a:t>
+              <a:t>[0:50] まず、機会はどこにあるか。</a:t>
+            </a:r>
+          </a:p>
+          <a:p>
+            <a:r>
+              <a:t>花粉症の患者数から薬剤Aの処方患者数を引いた「潜在未処方患者」は、処方患者の約2倍います。すべて処方されたとすると、理論上は約100億円分に当たります。</a:t>
+            </a:r>
+          </a:p>
+          <a:p>
+            <a:r>
+              <a:t>その77%は内科と耳鼻咽喉科にいて、潜在8人以上の医師、全体の21%が、潜在の41%を持っています。全国に換算すると約4.3万人です。</a:t>
+            </a:r>
+          </a:p>
+          <a:p>
+            <a:r>
+              <a:t>この医師を重点医師とし、MR君の配信を寄せます。</a:t>
             </a:r>
           </a:p>
         </p:txBody>
@@ -2497,7 +2491,7 @@
           </a:p>
           <a:p>
             <a:r>
-              <a:t>その結果、重点医師のうち191名には、MRもMR君も届いていません。</a:t>
+              <a:t>その結果、重点医師の27%、全国に換算すると約1.2万人には、MRもMR君も届いていません。</a:t>
             </a:r>
           </a:p>
         </p:txBody>
@@ -2567,7 +2561,7 @@
           <a:lstStyle/>
           <a:p>
             <a:r>
-              <a:t>[0:55] では、重点医師に何を届けるか。</a:t>
+              <a:t>[0:50] では、重点医師に何を届けるか。</a:t>
             </a:r>
           </a:p>
           <a:p>
@@ -2652,17 +2646,17 @@
           </a:p>
           <a:p>
             <a:r>
-              <a:t>MRもMR君も届いていない重点医師191名に、新たに月1回届けます。配信中の重点医師392名は、年10回を12回にして、未読の上位コンテンツを再配信します。</a:t>
-            </a:r>
-          </a:p>
-          <a:p>
-            <a:r>
-              <a:t>財源は、潜在患者が0〜2人の医師993名です。1人あたりの潜在は1.5人と少ないため、配信をゼロにはせず、隔月にします。</a:t>
-            </a:r>
-          </a:p>
-          <a:p>
-            <a:r>
-              <a:t>これで、予算は増やさず、費用は年6.7万円下がります。</a:t>
+              <a:t>MRもMR君も届いていない重点医師に、新たに月1回届けます。配信中の重点医師は、年10回を12回にして、未読の上位コンテンツを再配信します。</a:t>
+            </a:r>
+          </a:p>
+          <a:p>
+            <a:r>
+              <a:t>財源は、潜在患者が0〜2人の医師です。1人あたりの潜在は1.5人と少ないため、ゼロにはせず、隔月にします。</a:t>
+            </a:r>
+          </a:p>
+          <a:p>
+            <a:r>
+              <a:t>全国に換算すると、予算は増やさず、費用は年416万円下がります。</a:t>
             </a:r>
           </a:p>
         </p:txBody>
@@ -2812,12 +2806,17 @@
           <a:lstStyle/>
           <a:p>
             <a:r>
-              <a:t>[0:35] 費用は、既読1件400円で、群ごとの実際の既読率から計算しました。A案は施策①と②で153.4万円。今の160.2万円の範囲内です。</a:t>
-            </a:r>
-          </a:p>
-          <a:p>
-            <a:r>
-              <a:t>B案は、未接触で潜在5〜7人の260名にも届け、A案より14.9万円増えます。</a:t>
+              <a:t>[0:40] 費用は、既読1件400円で、群ごとの実際の既読率から計算し、全国に換算しました。</a:t>
+            </a:r>
+          </a:p>
+          <a:p>
+            <a:r>
+              <a:t>A案は施策①と②で年9,514万円。今の9,930万円の範囲内です。</a:t>
+            </a:r>
+          </a:p>
+          <a:p>
+            <a:r>
+              <a:t>B案は、未接触で潜在5〜7人の医師にも届け、A案より922万円増えます。</a:t>
             </a:r>
           </a:p>
         </p:txBody>
@@ -2887,17 +2886,22 @@
           <a:lstStyle/>
           <a:p>
             <a:r>
-              <a:t>[0:55] 効果は、配信で新たに読む医師の数に、1人あたりの潜在未処方と、そこから新たに処方される割合をかけて試算しました。この割合は1%、3%、6%と仮定し、潜在が翌年に変わる分も補正しています。</a:t>
-            </a:r>
-          </a:p>
-          <a:p>
-            <a:r>
-              <a:t>A案は追加の費用なしで、追加売上は年120万円から722万円、基準で361万円です。B案はさらに206万円から1,232万円です。</a:t>
-            </a:r>
-          </a:p>
-          <a:p>
-            <a:r>
-              <a:t>仮定にもとづく試算のため、まずA案で始め、既読と次回調査の理解度・処方率で確かめてから、B案を判断することを提案します。以上です。</a:t>
+              <a:t>[1:00] 効果は、新たに読む医師の数に、1人あたりの潜在未処方と、そこから新たに処方される割合をかけて試算しました。この割合は1%、3%、6%と仮定し、潜在が翌年に変わる分も補正しています。</a:t>
+            </a:r>
+          </a:p>
+          <a:p>
+            <a:r>
+              <a:t>全国に換算すると、A案は費用を抑えたまま、追加売上は年241万円から1,444万円、基準で722万円、売上の0.14%増です。</a:t>
+            </a:r>
+          </a:p>
+          <a:p>
+            <a:r>
+              <a:t>B案は922万円の追加費用に対して、追加売上はさらに410万円から2,464万円です。基準では、回収に利益率75%が必要になります。</a:t>
+            </a:r>
+          </a:p>
+          <a:p>
+            <a:r>
+              <a:t>そこで、まずA案で始め、既読と次回調査の理解度・処方率で効果を確かめてから、B案を判断することを提案します。以上です。</a:t>
             </a:r>
           </a:p>
         </p:txBody>
@@ -6005,7 +6009,7 @@
                 </a:solidFill>
                 <a:latin typeface="Meiryo"/>
               </a:rPr>
-              <a:t>MR君は医師の約7割に届く基盤。</a:t>
+              <a:t>MR君は医師の約9割に届けられる基盤。</a:t>
             </a:r>
           </a:p>
           <a:p>
@@ -6114,7 +6118,7 @@
                 </a:solidFill>
                 <a:latin typeface="Meiryo"/>
               </a:rPr>
-              <a:t>全医師10,000名の配信対象・MR面談記録(2025年6月〜2026年6月)。情報源 = アンケートQ5(MR面談なし・配信中の回答医師2,603名)。</a:t>
+              <a:t>31万人: M3会社資料。69%: データの医師10,000名の配信対象(2025年6月〜2026年6月)。50%: アンケートQ5(回答医師2,603名)。</a:t>
             </a:r>
           </a:p>
         </p:txBody>
@@ -6202,7 +6206,7 @@
         <p:spPr>
           <a:xfrm>
             <a:off x="502920" y="1783080"/>
-            <a:ext cx="5486400" cy="1737360"/>
+            <a:ext cx="5486400" cy="1143000"/>
           </a:xfrm>
           <a:prstGeom prst="rect">
             <a:avLst/>
@@ -6232,7 +6236,7 @@
         <p:spPr>
           <a:xfrm>
             <a:off x="502920" y="1783080"/>
-            <a:ext cx="109728" cy="1737360"/>
+            <a:ext cx="109728" cy="1143000"/>
           </a:xfrm>
           <a:prstGeom prst="rect">
             <a:avLst/>
@@ -6262,7 +6266,7 @@
         <p:spPr>
           <a:xfrm>
             <a:off x="777240" y="1783080"/>
-            <a:ext cx="1600200" cy="1737360"/>
+            <a:ext cx="1600200" cy="1143000"/>
           </a:xfrm>
           <a:prstGeom prst="rect">
             <a:avLst/>
@@ -6279,13 +6283,13 @@
           <a:p>
             <a:pPr algn="l"/>
             <a:r>
-              <a:rPr sz="3600" b="1">
+              <a:rPr sz="3000" b="1">
                 <a:solidFill>
                   <a:srgbClr val="0B2A5B"/>
                 </a:solidFill>
                 <a:latin typeface="Meiryo"/>
               </a:rPr>
-              <a:t>69%</a:t>
+              <a:t>31万人</a:t>
             </a:r>
           </a:p>
         </p:txBody>
@@ -6299,7 +6303,7 @@
         <p:spPr>
           <a:xfrm>
             <a:off x="2423160" y="1783080"/>
-            <a:ext cx="3429000" cy="1737360"/>
+            <a:ext cx="3429000" cy="1143000"/>
           </a:xfrm>
           <a:prstGeom prst="rect">
             <a:avLst/>
@@ -6326,7 +6330,7 @@
                 </a:solidFill>
                 <a:latin typeface="Meiryo"/>
               </a:rPr>
-              <a:t>全医師にMR君を配信</a:t>
+              <a:t>m3.comに登録する医師</a:t>
             </a:r>
           </a:p>
           <a:p>
@@ -6342,7 +6346,7 @@
                 </a:solidFill>
                 <a:latin typeface="Meiryo"/>
               </a:rPr>
-              <a:t>10,000名のうち6,948名</a:t>
+              <a:t>国内の医師の約9割。MR君はこの基盤で配信</a:t>
             </a:r>
           </a:p>
         </p:txBody>
@@ -6355,8 +6359,8 @@
         </p:nvSpPr>
         <p:spPr>
           <a:xfrm>
-            <a:off x="502920" y="3657600"/>
-            <a:ext cx="5486400" cy="1737360"/>
+            <a:off x="502920" y="3017520"/>
+            <a:ext cx="5486400" cy="1143000"/>
           </a:xfrm>
           <a:prstGeom prst="rect">
             <a:avLst/>
@@ -6385,8 +6389,8 @@
         </p:nvSpPr>
         <p:spPr>
           <a:xfrm>
-            <a:off x="502920" y="3657600"/>
-            <a:ext cx="109728" cy="1737360"/>
+            <a:off x="502920" y="3017520"/>
+            <a:ext cx="109728" cy="1143000"/>
           </a:xfrm>
           <a:prstGeom prst="rect">
             <a:avLst/>
@@ -6415,8 +6419,8 @@
         </p:nvSpPr>
         <p:spPr>
           <a:xfrm>
-            <a:off x="777240" y="3657600"/>
-            <a:ext cx="1600200" cy="1737360"/>
+            <a:off x="777240" y="3017520"/>
+            <a:ext cx="1600200" cy="1143000"/>
           </a:xfrm>
           <a:prstGeom prst="rect">
             <a:avLst/>
@@ -6439,7 +6443,7 @@
                 </a:solidFill>
                 <a:latin typeface="Meiryo"/>
               </a:rPr>
-              <a:t>50%</a:t>
+              <a:t>69%</a:t>
             </a:r>
           </a:p>
         </p:txBody>
@@ -6452,8 +6456,8 @@
         </p:nvSpPr>
         <p:spPr>
           <a:xfrm>
-            <a:off x="2423160" y="3657600"/>
-            <a:ext cx="3429000" cy="1737360"/>
+            <a:off x="2423160" y="3017520"/>
+            <a:ext cx="3429000" cy="1143000"/>
           </a:xfrm>
           <a:prstGeom prst="rect">
             <a:avLst/>
@@ -6480,6 +6484,160 @@
                 </a:solidFill>
                 <a:latin typeface="Meiryo"/>
               </a:rPr>
+              <a:t>MR君の配信先(データの医師)</a:t>
+            </a:r>
+          </a:p>
+          <a:p>
+            <a:pPr algn="l">
+              <a:spcAft>
+                <a:spcPts val="400"/>
+              </a:spcAft>
+            </a:pPr>
+            <a:r>
+              <a:rPr sz="1300" b="0">
+                <a:solidFill>
+                  <a:srgbClr val="5F6B7A"/>
+                </a:solidFill>
+                <a:latin typeface="Meiryo"/>
+              </a:rPr>
+              <a:t>データの10,000名のうち6,948名</a:t>
+            </a:r>
+          </a:p>
+        </p:txBody>
+      </p:sp>
+      <p:sp>
+        <p:nvSpPr>
+          <p:cNvPr id="16" name="Rectangle 15"/>
+          <p:cNvSpPr/>
+          <p:nvPr/>
+        </p:nvSpPr>
+        <p:spPr>
+          <a:xfrm>
+            <a:off x="502920" y="4251960"/>
+            <a:ext cx="5486400" cy="1143000"/>
+          </a:xfrm>
+          <a:prstGeom prst="rect">
+            <a:avLst/>
+          </a:prstGeom>
+          <a:solidFill>
+            <a:srgbClr val="F1F4F9"/>
+          </a:solidFill>
+          <a:ln>
+            <a:noFill/>
+          </a:ln>
+          <a:effectLst/>
+        </p:spPr>
+        <p:txBody>
+          <a:bodyPr rtlCol="0" anchor="ctr"/>
+          <a:lstStyle/>
+          <a:p>
+            <a:pPr algn="ctr"/>
+          </a:p>
+        </p:txBody>
+      </p:sp>
+      <p:sp>
+        <p:nvSpPr>
+          <p:cNvPr id="17" name="Rectangle 16"/>
+          <p:cNvSpPr/>
+          <p:nvPr/>
+        </p:nvSpPr>
+        <p:spPr>
+          <a:xfrm>
+            <a:off x="502920" y="4251960"/>
+            <a:ext cx="109728" cy="1143000"/>
+          </a:xfrm>
+          <a:prstGeom prst="rect">
+            <a:avLst/>
+          </a:prstGeom>
+          <a:solidFill>
+            <a:srgbClr val="0B2A5B"/>
+          </a:solidFill>
+          <a:ln>
+            <a:noFill/>
+          </a:ln>
+          <a:effectLst/>
+        </p:spPr>
+        <p:txBody>
+          <a:bodyPr rtlCol="0" anchor="ctr"/>
+          <a:lstStyle/>
+          <a:p>
+            <a:pPr algn="ctr"/>
+          </a:p>
+        </p:txBody>
+      </p:sp>
+      <p:sp>
+        <p:nvSpPr>
+          <p:cNvPr id="18" name="Rectangle 17"/>
+          <p:cNvSpPr/>
+          <p:nvPr/>
+        </p:nvSpPr>
+        <p:spPr>
+          <a:xfrm>
+            <a:off x="777240" y="4251960"/>
+            <a:ext cx="1600200" cy="1143000"/>
+          </a:xfrm>
+          <a:prstGeom prst="rect">
+            <a:avLst/>
+          </a:prstGeom>
+          <a:noFill/>
+          <a:ln>
+            <a:noFill/>
+          </a:ln>
+          <a:effectLst/>
+        </p:spPr>
+        <p:txBody>
+          <a:bodyPr rtlCol="0" anchor="ctr" wrap="square"/>
+          <a:lstStyle/>
+          <a:p>
+            <a:pPr algn="l"/>
+            <a:r>
+              <a:rPr sz="3600" b="1">
+                <a:solidFill>
+                  <a:srgbClr val="0B2A5B"/>
+                </a:solidFill>
+                <a:latin typeface="Meiryo"/>
+              </a:rPr>
+              <a:t>50%</a:t>
+            </a:r>
+          </a:p>
+        </p:txBody>
+      </p:sp>
+      <p:sp>
+        <p:nvSpPr>
+          <p:cNvPr id="19" name="Rectangle 18"/>
+          <p:cNvSpPr/>
+          <p:nvPr/>
+        </p:nvSpPr>
+        <p:spPr>
+          <a:xfrm>
+            <a:off x="2423160" y="4251960"/>
+            <a:ext cx="3429000" cy="1143000"/>
+          </a:xfrm>
+          <a:prstGeom prst="rect">
+            <a:avLst/>
+          </a:prstGeom>
+          <a:noFill/>
+          <a:ln>
+            <a:noFill/>
+          </a:ln>
+          <a:effectLst/>
+        </p:spPr>
+        <p:txBody>
+          <a:bodyPr rtlCol="0" anchor="ctr" wrap="square"/>
+          <a:lstStyle/>
+          <a:p>
+            <a:pPr algn="l">
+              <a:spcAft>
+                <a:spcPts val="400"/>
+              </a:spcAft>
+            </a:pPr>
+            <a:r>
+              <a:rPr sz="1700" b="1">
+                <a:solidFill>
+                  <a:srgbClr val="1B1B1B"/>
+                </a:solidFill>
+                <a:latin typeface="Meiryo"/>
+              </a:rPr>
               <a:t>最も参考になった情報源の1位</a:t>
             </a:r>
           </a:p>
@@ -6503,7 +6661,7 @@
       </p:sp>
       <p:sp>
         <p:nvSpPr>
-          <p:cNvPr id="16" name="Rectangle 15"/>
+          <p:cNvPr id="20" name="Rectangle 19"/>
           <p:cNvSpPr/>
           <p:nvPr/>
         </p:nvSpPr>
@@ -6540,7 +6698,7 @@
       </p:sp>
       <p:sp>
         <p:nvSpPr>
-          <p:cNvPr id="17" name="Rectangle 16"/>
+          <p:cNvPr id="21" name="Rectangle 20"/>
           <p:cNvSpPr/>
           <p:nvPr/>
         </p:nvSpPr>
@@ -6570,7 +6728,7 @@
       </p:sp>
       <p:sp>
         <p:nvSpPr>
-          <p:cNvPr id="18" name="Rectangle 17"/>
+          <p:cNvPr id="22" name="Rectangle 21"/>
           <p:cNvSpPr/>
           <p:nvPr/>
         </p:nvSpPr>
@@ -6600,7 +6758,7 @@
       </p:sp>
       <p:sp>
         <p:nvSpPr>
-          <p:cNvPr id="19" name="Rectangle 18"/>
+          <p:cNvPr id="23" name="Rectangle 22"/>
           <p:cNvSpPr/>
           <p:nvPr/>
         </p:nvSpPr>
@@ -6637,7 +6795,7 @@
       </p:sp>
       <p:sp>
         <p:nvSpPr>
-          <p:cNvPr id="20" name="Rectangle 19"/>
+          <p:cNvPr id="24" name="Rectangle 23"/>
           <p:cNvSpPr/>
           <p:nvPr/>
         </p:nvSpPr>
@@ -6694,7 +6852,7 @@
       </p:sp>
       <p:sp>
         <p:nvSpPr>
-          <p:cNvPr id="21" name="Rectangle 20"/>
+          <p:cNvPr id="25" name="Rectangle 24"/>
           <p:cNvSpPr/>
           <p:nvPr/>
         </p:nvSpPr>
@@ -6724,7 +6882,7 @@
       </p:sp>
       <p:sp>
         <p:nvSpPr>
-          <p:cNvPr id="22" name="Rectangle 21"/>
+          <p:cNvPr id="26" name="Rectangle 25"/>
           <p:cNvSpPr/>
           <p:nvPr/>
         </p:nvSpPr>
@@ -6754,7 +6912,7 @@
       </p:sp>
       <p:sp>
         <p:nvSpPr>
-          <p:cNvPr id="23" name="Rectangle 22"/>
+          <p:cNvPr id="27" name="Rectangle 26"/>
           <p:cNvSpPr/>
           <p:nvPr/>
         </p:nvSpPr>
@@ -6791,7 +6949,7 @@
       </p:sp>
       <p:sp>
         <p:nvSpPr>
-          <p:cNvPr id="24" name="Rectangle 23"/>
+          <p:cNvPr id="28" name="Rectangle 27"/>
           <p:cNvSpPr/>
           <p:nvPr/>
         </p:nvSpPr>
@@ -6848,7 +7006,7 @@
       </p:sp>
       <p:sp>
         <p:nvSpPr>
-          <p:cNvPr id="25" name="Rectangle 24"/>
+          <p:cNvPr id="29" name="Rectangle 28"/>
           <p:cNvSpPr/>
           <p:nvPr/>
         </p:nvSpPr>
@@ -9448,7 +9606,7 @@
                 </a:solidFill>
                 <a:latin typeface="Meiryo"/>
               </a:rPr>
-              <a:t>重点医師701名に集中している</a:t>
+              <a:t>潜在患者の多い医師(重点医師)に集中</a:t>
             </a:r>
           </a:p>
         </p:txBody>
@@ -9545,7 +9703,7 @@
                 </a:solidFill>
                 <a:latin typeface="Meiryo"/>
               </a:rPr>
-              <a:t>潜在未処方 = 花粉症患者数 − 薬剤A処方患者数(2026年アンケート、直近1年・自己申告)。内科・耳鼻の回答医師3,286名。</a:t>
+              <a:t>潜在未処方 = 花粉症患者数 − 薬剤A処方患者数(2026年アンケート、直近1年・自己申告)。全国換算 = 回答医師5,000名 × 62(m3.com登録医師31万人)。</a:t>
             </a:r>
           </a:p>
         </p:txBody>
@@ -9775,7 +9933,7 @@
                 </a:solidFill>
                 <a:latin typeface="Meiryo"/>
               </a:rPr>
-              <a:t>医師の21%(701名)が、潜在未処方の41%を持つ</a:t>
+              <a:t>医師の21%(全国換算 約4.3万人)が、潜在未処方の41%を持つ</a:t>
             </a:r>
           </a:p>
           <a:p>
@@ -9791,7 +9949,7 @@
                 </a:solidFill>
                 <a:latin typeface="Meiryo"/>
               </a:rPr>
-              <a:t>潜在未処方の77%は内科・耳鼻咽喉科</a:t>
+              <a:t>潜在未処方は処方患者の約2倍(全国換算 約142万人)。すべて処方されれば約100億円(理論上の上限)</a:t>
             </a:r>
           </a:p>
         </p:txBody>
@@ -9830,7 +9988,7 @@
                 </a:solidFill>
                 <a:latin typeface="Meiryo"/>
               </a:rPr>
-              <a:t>→ 内科・耳鼻で潜在8人以上の701名を「重点医師」とし、MR君を寄せる</a:t>
+              <a:t>→ 内科・耳鼻で潜在8人以上の医師を「重点医師」とし、MR君を寄せる</a:t>
             </a:r>
           </a:p>
         </p:txBody>
@@ -9897,7 +10055,7 @@
                 </a:solidFill>
                 <a:latin typeface="Meiryo"/>
               </a:rPr>
-              <a:t>重点医師の191名にはMRもMR君も届いていない</a:t>
+              <a:t>重点医師の27%にはMRもMR君も届いていない</a:t>
             </a:r>
           </a:p>
         </p:txBody>
@@ -9994,7 +10152,7 @@
                 </a:solidFill>
                 <a:latin typeface="Meiryo"/>
               </a:rPr>
-              <a:t>配信率 = MR君の配信対象の割合(内科・耳鼻の回答医師3,286名)。配信対象の選定理由はデータにないため未確認。</a:t>
+              <a:t>配信率 = MR君の配信対象の割合(内科・耳鼻の回答医師3,286名)。配信対象の選定理由はデータにないため未確認。全国換算 = 回答医師 × 62。</a:t>
             </a:r>
           </a:p>
         </p:txBody>
@@ -10177,13 +10335,13 @@
           <a:p>
             <a:pPr algn="l"/>
             <a:r>
-              <a:rPr sz="5400" b="1">
+              <a:rPr sz="4600" b="1">
                 <a:solidFill>
                   <a:srgbClr val="E8602C"/>
                 </a:solidFill>
                 <a:latin typeface="Meiryo"/>
               </a:rPr>
-              <a:t>191名</a:t>
+              <a:t>約1.2万人</a:t>
             </a:r>
           </a:p>
         </p:txBody>
@@ -10224,7 +10382,7 @@
                 </a:solidFill>
                 <a:latin typeface="Meiryo"/>
               </a:rPr>
-              <a:t>重点医師のうち、MRもMR君も届いていない医師</a:t>
+              <a:t>MRもMR君も届いていない重点医師(全国換算)</a:t>
             </a:r>
           </a:p>
           <a:p>
@@ -10240,7 +10398,7 @@
                 </a:solidFill>
                 <a:latin typeface="Meiryo"/>
               </a:rPr>
-              <a:t>1人あたり潜在未処方10.7人</a:t>
+              <a:t>回答医師では701名のうち191名。1人あたり潜在未処方10.7人</a:t>
             </a:r>
           </a:p>
         </p:txBody>
@@ -10911,7 +11069,7 @@
                 </a:solidFill>
                 <a:latin typeface="Meiryo"/>
               </a:rPr>
-              <a:t>12回 = 10本 + 未読の上位コンテンツの再配信2回。前提: 新規配信先の配信資格・同意、医師別の回数設定(未確認)。MR面談がある重点医師は現状維持。</a:t>
+              <a:t>人数・費用は全国換算(回答医師 × 62)。12回 = 10本 + 未読の上位コンテンツの再配信2回。前提: 新規配信先の配信資格・同意、医師別の回数設定(未確認)。</a:t>
             </a:r>
           </a:p>
         </p:txBody>
@@ -11100,7 +11258,7 @@
                 </a:solidFill>
                 <a:latin typeface="Meiryo"/>
               </a:rPr>
-              <a:t>−6.7万円</a:t>
+              <a:t>−416万円</a:t>
             </a:r>
           </a:p>
         </p:txBody>
@@ -11141,7 +11299,7 @@
                 </a:solidFill>
                 <a:latin typeface="Meiryo"/>
               </a:rPr>
-              <a:t>年間費用の変化(A案)</a:t>
+              <a:t>年間費用の変化(A案、全国)</a:t>
             </a:r>
           </a:p>
           <a:p>
@@ -11157,7 +11315,7 @@
                 </a:solidFill>
                 <a:latin typeface="Meiryo"/>
               </a:rPr>
-              <a:t>増やす分 +11.9万円(①②)</a:t>
+              <a:t>増やす分 約740万円(①②)</a:t>
             </a:r>
           </a:p>
           <a:p>
@@ -11173,7 +11331,7 @@
                 </a:solidFill>
                 <a:latin typeface="Meiryo"/>
               </a:rPr>
-              <a:t>減らす分 −18.6万円(③)</a:t>
+              <a:t>減らす分 約1,160万円(③)</a:t>
             </a:r>
           </a:p>
         </p:txBody>
@@ -11212,7 +11370,7 @@
                 </a:solidFill>
                 <a:latin typeface="Meiryo"/>
               </a:rPr>
-              <a:t>→ 未接触の191名に月1回、配信中の392名も月1回、潜在0〜2人の993名は隔月</a:t>
+              <a:t>→ 未接触の重点医師に月1回、配信中の重点医師も月1回、潜在0〜2人の医師は隔月</a:t>
             </a:r>
           </a:p>
         </p:txBody>
@@ -11453,7 +11611,7 @@
                 </a:solidFill>
                 <a:latin typeface="Meiryo"/>
               </a:rPr>
-              <a:t>内科(重点医師292名)</a:t>
+              <a:t>内科の重点医師</a:t>
             </a:r>
           </a:p>
         </p:txBody>
@@ -11508,7 +11666,7 @@
                 </a:solidFill>
                 <a:latin typeface="Meiryo"/>
               </a:rPr>
-              <a:t>耳鼻咽喉科(重点医師409名)</a:t>
+              <a:t>耳鼻咽喉科の重点医師</a:t>
             </a:r>
           </a:p>
         </p:txBody>
@@ -11786,7 +11944,7 @@
                 </a:solidFill>
                 <a:latin typeface="Meiryo"/>
               </a:rPr>
-              <a:t>B案は+14.9万円で未接触260名にも広げる</a:t>
+              <a:t>B案は+922万円で未接触の医師にも広げる</a:t>
             </a:r>
           </a:p>
         </p:txBody>
@@ -11886,7 +12044,7 @@
                 </a:solidFill>
                 <a:latin typeface="Meiryo"/>
               </a:rPr>
-              <a:t>回答医師5,000名・1年分。費用 = 既読件数 × 400円(既読率は群別の実測値)。配信設定・運用費は未確認で含まない。</a:t>
+              <a:t>全国換算(回答医師 × 62)。費用 = 既読件数 × 400円(既読率は群別の実測値)。配信設定・運用費は未確認で含まない。</a:t>
             </a:r>
           </a:p>
         </p:txBody>
@@ -11960,7 +12118,7 @@
                 </a:solidFill>
                 <a:latin typeface="Meiryo"/>
               </a:rPr>
-              <a:t>MR君の年間費用(万円)と配信する医師数</a:t>
+              <a:t>MR君の年間費用(全国、万円)と配信する医師数</a:t>
             </a:r>
           </a:p>
         </p:txBody>
@@ -12069,13 +12227,13 @@
           <a:p>
             <a:pPr algn="l"/>
             <a:r>
-              <a:rPr sz="4600" b="1">
+              <a:rPr sz="4400" b="1">
                 <a:solidFill>
                   <a:srgbClr val="E8602C"/>
                 </a:solidFill>
                 <a:latin typeface="Meiryo"/>
               </a:rPr>
-              <a:t>153.4万円</a:t>
+              <a:t>9,514万円</a:t>
             </a:r>
           </a:p>
         </p:txBody>
@@ -12116,7 +12274,7 @@
                 </a:solidFill>
                 <a:latin typeface="Meiryo"/>
               </a:rPr>
-              <a:t>A案(現状160.2万円の範囲内)</a:t>
+              <a:t>A案(現状9,930万円の範囲内)</a:t>
             </a:r>
           </a:p>
           <a:p>
@@ -12148,7 +12306,7 @@
                 </a:solidFill>
                 <a:latin typeface="Meiryo"/>
               </a:rPr>
-              <a:t>B案 = A案+未接触260名</a:t>
+              <a:t>B案 = A案+未接触・潜在5〜7人</a:t>
             </a:r>
           </a:p>
           <a:p>
@@ -12164,7 +12322,7 @@
                 </a:solidFill>
                 <a:latin typeface="Meiryo"/>
               </a:rPr>
-              <a:t>(A案より+14.9万円)</a:t>
+              <a:t>(約1.6万人、A案より+922万円)</a:t>
             </a:r>
           </a:p>
         </p:txBody>
@@ -12258,7 +12416,7 @@
                 </a:solidFill>
                 <a:latin typeface="Meiryo"/>
               </a:rPr>
-              <a:t>A案は予算内で追加売上 年120〜722万円(試算)。</a:t>
+              <a:t>A案は費用を抑えて追加売上 年241〜1,444万円(試算)。</a:t>
             </a:r>
           </a:p>
           <a:p>
@@ -12370,7 +12528,7 @@
                 </a:solidFill>
                 <a:latin typeface="Meiryo"/>
               </a:rPr>
-              <a:t>増分転換率1・3・6%と、処方患者1人あたり年間売上22.2万円は仮定。翌年の潜在の変化(平均への回帰)を補正。売上であり利益ではない。</a:t>
+              <a:t>全国換算(× 62)。1人あたり年間売上 約7,149円 = 50億円 ÷ 全国の処方患者推計。転換率1・3・6%は仮定。翌年の潜在の変化を補正。売上≠利益。</a:t>
             </a:r>
           </a:p>
         </p:txBody>
@@ -12444,7 +12602,7 @@
                 </a:solidFill>
                 <a:latin typeface="Meiryo"/>
               </a:rPr>
-              <a:t>想定追加売上(年、万円)</a:t>
+              <a:t>想定追加売上(年、全国、万円)</a:t>
             </a:r>
           </a:p>
         </p:txBody>
@@ -12559,7 +12717,7 @@
                 </a:solidFill>
                 <a:latin typeface="Meiryo"/>
               </a:rPr>
-              <a:t>361万円</a:t>
+              <a:t>722万円</a:t>
             </a:r>
           </a:p>
         </p:txBody>
@@ -12600,7 +12758,7 @@
                 </a:solidFill>
                 <a:latin typeface="Meiryo"/>
               </a:rPr>
-              <a:t>A案の追加売上(基準、年)</a:t>
+              <a:t>A案の追加売上(基準、年)= 売上の+0.14%</a:t>
             </a:r>
           </a:p>
           <a:p>
@@ -12616,7 +12774,7 @@
                 </a:solidFill>
                 <a:latin typeface="Meiryo"/>
               </a:rPr>
-              <a:t>追加処方患者16人。仮定にもとづく試算で、効果は実証されていない</a:t>
+              <a:t>追加処方患者 約1,010人(全国)。仮定にもとづく試算で、効果は実証されていない</a:t>
             </a:r>
           </a:p>
         </p:txBody>
@@ -12744,7 +12902,7 @@
                 </a:solidFill>
                 <a:latin typeface="Meiryo"/>
               </a:rPr>
-              <a:t>→ B案はさらに+206〜1,232万円。効果を確かめてから判断する</a:t>
+              <a:t>→ B案は+922万円で追加売上+410〜2,464万円。効果を確かめてから判断</a:t>
             </a:r>
           </a:p>
         </p:txBody>
@@ -12968,7 +13126,7 @@
                 <a:gridCol w="1225296"/>
                 <a:gridCol w="1225296"/>
               </a:tblGrid>
-              <a:tr h="405765">
+              <a:tr h="360680">
                 <a:tc>
                   <a:txBody>
                     <a:bodyPr/>
@@ -13179,7 +13337,7 @@
                   </a:tcPr>
                 </a:tc>
               </a:tr>
-              <a:tr h="405765">
+              <a:tr h="360680">
                 <a:tc>
                   <a:txBody>
                     <a:bodyPr/>
@@ -13342,7 +13500,7 @@
                   </a:tcPr>
                 </a:tc>
               </a:tr>
-              <a:tr h="405765">
+              <a:tr h="360680">
                 <a:tc>
                   <a:txBody>
                     <a:bodyPr/>
@@ -13505,7 +13663,7 @@
                   </a:tcPr>
                 </a:tc>
               </a:tr>
-              <a:tr h="405765">
+              <a:tr h="360680">
                 <a:tc>
                   <a:txBody>
                     <a:bodyPr/>
@@ -13668,7 +13826,7 @@
                   </a:tcPr>
                 </a:tc>
               </a:tr>
-              <a:tr h="405765">
+              <a:tr h="360680">
                 <a:tc>
                   <a:txBody>
                     <a:bodyPr/>
@@ -13831,7 +13989,7 @@
                   </a:tcPr>
                 </a:tc>
               </a:tr>
-              <a:tr h="405765">
+              <a:tr h="360680">
                 <a:tc>
                   <a:txBody>
                     <a:bodyPr/>
@@ -13994,7 +14152,7 @@
                   </a:tcPr>
                 </a:tc>
               </a:tr>
-              <a:tr h="405765">
+              <a:tr h="360680">
                 <a:tc>
                   <a:txBody>
                     <a:bodyPr/>
@@ -14157,7 +14315,7 @@
                   </a:tcPr>
                 </a:tc>
               </a:tr>
-              <a:tr h="405765">
+              <a:tr h="360680">
                 <a:tc>
                   <a:txBody>
                     <a:bodyPr/>
@@ -14171,7 +14329,7 @@
                           </a:solidFill>
                           <a:latin typeface="Meiryo"/>
                         </a:rPr>
-                        <a:t>合計</a:t>
+                        <a:t>合計(回答医師)</a:t>
                       </a:r>
                     </a:p>
                   </a:txBody>
@@ -14316,6 +14474,169 @@
                   <a:tcPr anchor="ctr" marL="73152" marR="73152">
                     <a:solidFill>
                       <a:srgbClr val="F1F4F9"/>
+                    </a:solidFill>
+                  </a:tcPr>
+                </a:tc>
+              </a:tr>
+              <a:tr h="360680">
+                <a:tc>
+                  <a:txBody>
+                    <a:bodyPr/>
+                    <a:lstStyle/>
+                    <a:p>
+                      <a:pPr algn="l"/>
+                      <a:r>
+                        <a:rPr sz="1100" b="1">
+                          <a:solidFill>
+                            <a:srgbClr val="1B1B1B"/>
+                          </a:solidFill>
+                          <a:latin typeface="Meiryo"/>
+                        </a:rPr>
+                        <a:t>全国換算(× 62)</a:t>
+                      </a:r>
+                    </a:p>
+                  </a:txBody>
+                  <a:tcPr anchor="ctr" marL="73152" marR="73152">
+                    <a:solidFill>
+                      <a:srgbClr val="FFFFFF"/>
+                    </a:solidFill>
+                  </a:tcPr>
+                </a:tc>
+                <a:tc>
+                  <a:txBody>
+                    <a:bodyPr/>
+                    <a:lstStyle/>
+                    <a:p>
+                      <a:pPr algn="ctr"/>
+                      <a:r>
+                        <a:rPr sz="1100" b="1">
+                          <a:solidFill>
+                            <a:srgbClr val="1B1B1B"/>
+                          </a:solidFill>
+                          <a:latin typeface="Meiryo"/>
+                        </a:rPr>
+                        <a:t/>
+                      </a:r>
+                    </a:p>
+                  </a:txBody>
+                  <a:tcPr anchor="ctr" marL="73152" marR="73152">
+                    <a:solidFill>
+                      <a:srgbClr val="FFFFFF"/>
+                    </a:solidFill>
+                  </a:tcPr>
+                </a:tc>
+                <a:tc>
+                  <a:txBody>
+                    <a:bodyPr/>
+                    <a:lstStyle/>
+                    <a:p>
+                      <a:pPr algn="ctr"/>
+                      <a:r>
+                        <a:rPr sz="1100" b="1">
+                          <a:solidFill>
+                            <a:srgbClr val="1B1B1B"/>
+                          </a:solidFill>
+                          <a:latin typeface="Meiryo"/>
+                        </a:rPr>
+                        <a:t/>
+                      </a:r>
+                    </a:p>
+                  </a:txBody>
+                  <a:tcPr anchor="ctr" marL="73152" marR="73152">
+                    <a:solidFill>
+                      <a:srgbClr val="FFFFFF"/>
+                    </a:solidFill>
+                  </a:tcPr>
+                </a:tc>
+                <a:tc>
+                  <a:txBody>
+                    <a:bodyPr/>
+                    <a:lstStyle/>
+                    <a:p>
+                      <a:pPr algn="ctr"/>
+                      <a:r>
+                        <a:rPr sz="1100" b="1">
+                          <a:solidFill>
+                            <a:srgbClr val="1B1B1B"/>
+                          </a:solidFill>
+                          <a:latin typeface="Meiryo"/>
+                        </a:rPr>
+                        <a:t>9,930→9,514</a:t>
+                      </a:r>
+                    </a:p>
+                  </a:txBody>
+                  <a:tcPr anchor="ctr" marL="73152" marR="73152">
+                    <a:solidFill>
+                      <a:srgbClr val="FFFFFF"/>
+                    </a:solidFill>
+                  </a:tcPr>
+                </a:tc>
+                <a:tc>
+                  <a:txBody>
+                    <a:bodyPr/>
+                    <a:lstStyle/>
+                    <a:p>
+                      <a:pPr algn="ctr"/>
+                      <a:r>
+                        <a:rPr sz="1100" b="1">
+                          <a:solidFill>
+                            <a:srgbClr val="1B1B1B"/>
+                          </a:solidFill>
+                          <a:latin typeface="Meiryo"/>
+                        </a:rPr>
+                        <a:t/>
+                      </a:r>
+                    </a:p>
+                  </a:txBody>
+                  <a:tcPr anchor="ctr" marL="73152" marR="73152">
+                    <a:solidFill>
+                      <a:srgbClr val="FFFFFF"/>
+                    </a:solidFill>
+                  </a:tcPr>
+                </a:tc>
+                <a:tc>
+                  <a:txBody>
+                    <a:bodyPr/>
+                    <a:lstStyle/>
+                    <a:p>
+                      <a:pPr algn="ctr"/>
+                      <a:r>
+                        <a:rPr sz="1100" b="1">
+                          <a:solidFill>
+                            <a:srgbClr val="1B1B1B"/>
+                          </a:solidFill>
+                          <a:latin typeface="Meiryo"/>
+                        </a:rPr>
+                        <a:t>1,010</a:t>
+                      </a:r>
+                    </a:p>
+                  </a:txBody>
+                  <a:tcPr anchor="ctr" marL="73152" marR="73152">
+                    <a:solidFill>
+                      <a:srgbClr val="FFFFFF"/>
+                    </a:solidFill>
+                  </a:tcPr>
+                </a:tc>
+                <a:tc>
+                  <a:txBody>
+                    <a:bodyPr/>
+                    <a:lstStyle/>
+                    <a:p>
+                      <a:pPr algn="ctr"/>
+                      <a:r>
+                        <a:rPr sz="1100" b="1">
+                          <a:solidFill>
+                            <a:srgbClr val="1B1B1B"/>
+                          </a:solidFill>
+                          <a:latin typeface="Meiryo"/>
+                        </a:rPr>
+                        <a:t>2,733</a:t>
+                      </a:r>
+                    </a:p>
+                  </a:txBody>
+                  <a:tcPr anchor="ctr" marL="73152" marR="73152">
+                    <a:solidFill>
+                      <a:srgbClr val="FFFFFF"/>
                     </a:solidFill>
                   </a:tcPr>
                 </a:tc>
@@ -14369,7 +14690,7 @@
                 </a:solidFill>
                 <a:latin typeface="Meiryo"/>
               </a:rPr>
-              <a:t>増分転換率1・3・6%(参考: 配信対象は処方率の伸びが+2.3pt、換算2.8%〜6.0%。観察値で因果ではない)、1人あたり年間売上22.2万円(50億円 ÷ 全医師の処方患者推計)、新規配信先の既読率は②の実測値</a:t>
+              <a:t>増分転換率1・3・6%(参考: 配信対象は処方率の伸びが+2.3pt、換算2.8%〜6.0%。観察値で因果ではない)、全国換算の倍率62(m3.com登録医師31万人 ÷ 回答医師5,000名)、1人あたり年間売上 約7,149円(50億円 ÷ 全国の処方患者推計)、新規配信先の既読率は②の実測値</a:t>
             </a:r>
           </a:p>
           <a:p>
